--- a/Foundation_F2/Workshop/F2-W02_Apply_Workshop_L03-L04_International_Summer_Camp.pptx
+++ b/Foundation_F2/Workshop/F2-W02_Apply_Workshop_L03-L04_International_Summer_Camp.pptx
@@ -7436,7 +7436,7 @@
                 <a:latin typeface="Calibri" pitchFamily="34" charset="0"/>
                 <a:cs typeface="Amiri" pitchFamily="2" charset="-78"/>
               </a:rPr>
-              <a:t>Odd numbers come from F2-L03, even numbers from F2-L04. Core: a full sentence from the starter. Develop: add the “more” part. Stretch: link two answers with </a:t>
+              <a:t>Odd numbers come from F2-L03, even numbers from F2-L04. Core: a full sentence from the starter. Develop: add the “more” part. Stretch: link two answers with ‏</a:t>
             </a:r>
             <a:pPr algn="l" indent="0" marL="0">
               <a:buNone/>
@@ -7463,7 +7463,7 @@
                 <a:latin typeface="Calibri" pitchFamily="34" charset="0"/>
                 <a:cs typeface="Amiri" pitchFamily="2" charset="-78"/>
               </a:rPr>
-              <a:t>, </a:t>
+              <a:t>‏, ‏</a:t>
             </a:r>
             <a:pPr algn="l" indent="0" marL="0">
               <a:buNone/>
@@ -7490,7 +7490,7 @@
                 <a:latin typeface="Calibri" pitchFamily="34" charset="0"/>
                 <a:cs typeface="Amiri" pitchFamily="2" charset="-78"/>
               </a:rPr>
-              <a:t> or </a:t>
+              <a:t>‏ or ‏</a:t>
             </a:r>
             <a:pPr algn="l" indent="0" marL="0">
               <a:buNone/>
@@ -7517,7 +7517,7 @@
                 <a:latin typeface="Calibri" pitchFamily="34" charset="0"/>
                 <a:cs typeface="Amiri" pitchFamily="2" charset="-78"/>
               </a:rPr>
-              <a:t>. Swap after each question.</a:t>
+              <a:t>‏. Swap after each question.</a:t>
             </a:r>
             <a:endParaRPr lang="en-US" sz="1100" dirty="0"/>
           </a:p>
@@ -10840,7 +10840,7 @@
                 <a:latin typeface="Calibri" pitchFamily="34" charset="0"/>
                 <a:cs typeface="Amiri" pitchFamily="2" charset="-78"/>
               </a:rPr>
-              <a:t>Add a family member: </a:t>
+              <a:t>Add a family member: ‏</a:t>
             </a:r>
             <a:pPr algn="l" indent="0" marL="0">
               <a:buNone/>
@@ -10867,7 +10867,7 @@
                 <a:latin typeface="Calibri" pitchFamily="34" charset="0"/>
                 <a:cs typeface="Amiri" pitchFamily="2" charset="-78"/>
               </a:rPr>
-              <a:t> … (nationality).</a:t>
+              <a:t> …‏ (nationality).</a:t>
             </a:r>
             <a:endParaRPr lang="en-US" sz="1150" dirty="0"/>
           </a:p>
@@ -11004,7 +11004,7 @@
                 <a:latin typeface="Calibri" pitchFamily="34" charset="0"/>
                 <a:cs typeface="Amiri" pitchFamily="2" charset="-78"/>
               </a:rPr>
-              <a:t>Add what you understand or read (</a:t>
+              <a:t>Add what you understand or read (‏</a:t>
             </a:r>
             <a:pPr algn="l" indent="0" marL="0">
               <a:buNone/>
@@ -11058,7 +11058,7 @@
                 <a:latin typeface="Calibri" pitchFamily="34" charset="0"/>
                 <a:cs typeface="Amiri" pitchFamily="2" charset="-78"/>
               </a:rPr>
-              <a:t>) and a number under 10 (… </a:t>
+              <a:t>‏) and a number under 10 (… ‏</a:t>
             </a:r>
             <a:pPr algn="l" indent="0" marL="0">
               <a:buNone/>
@@ -11085,7 +11085,7 @@
                 <a:latin typeface="Calibri" pitchFamily="34" charset="0"/>
                 <a:cs typeface="Amiri" pitchFamily="2" charset="-78"/>
               </a:rPr>
-              <a:t>).</a:t>
+              <a:t>‏).</a:t>
             </a:r>
             <a:endParaRPr lang="en-US" sz="1150" dirty="0"/>
           </a:p>
@@ -17446,7 +17446,7 @@
                 <a:latin typeface="Calibri" pitchFamily="34" charset="0"/>
                 <a:cs typeface="Amiri" pitchFamily="2" charset="-78"/>
               </a:rPr>
-              <a:t>11–20 + singular </a:t>
+              <a:t>11–20 + singular ‏</a:t>
             </a:r>
             <a:pPr algn="l" indent="0" marL="0">
               <a:buNone/>
@@ -17473,7 +17473,7 @@
                 <a:latin typeface="Calibri" pitchFamily="34" charset="0"/>
                 <a:cs typeface="Amiri" pitchFamily="2" charset="-78"/>
               </a:rPr>
-              <a:t>.</a:t>
+              <a:t>‏.</a:t>
             </a:r>
             <a:endParaRPr lang="en-US" sz="1150" dirty="0"/>
           </a:p>
@@ -17684,7 +17684,7 @@
                 <a:latin typeface="Calibri" pitchFamily="34" charset="0"/>
                 <a:cs typeface="Amiri" pitchFamily="2" charset="-78"/>
               </a:rPr>
-              <a:t>A woman → -iyyatun: </a:t>
+              <a:t>A woman → -iyyatun: ‏</a:t>
             </a:r>
             <a:pPr algn="l" indent="0" marL="0">
               <a:buNone/>
@@ -17711,7 +17711,7 @@
                 <a:latin typeface="Calibri" pitchFamily="34" charset="0"/>
                 <a:cs typeface="Amiri" pitchFamily="2" charset="-78"/>
               </a:rPr>
-              <a:t>.</a:t>
+              <a:t>‏.</a:t>
             </a:r>
             <a:endParaRPr lang="en-US" sz="1150" dirty="0"/>
           </a:p>
@@ -17922,7 +17922,7 @@
                 <a:latin typeface="Calibri" pitchFamily="34" charset="0"/>
                 <a:cs typeface="Amiri" pitchFamily="2" charset="-78"/>
               </a:rPr>
-              <a:t>Her age → </a:t>
+              <a:t>Her age → ‏</a:t>
             </a:r>
             <a:pPr algn="l" indent="0" marL="0">
               <a:buNone/>
@@ -17949,7 +17949,7 @@
                 <a:latin typeface="Calibri" pitchFamily="34" charset="0"/>
                 <a:cs typeface="Amiri" pitchFamily="2" charset="-78"/>
               </a:rPr>
-              <a:t> (-hā).</a:t>
+              <a:t>‏ (-hā).</a:t>
             </a:r>
             <a:endParaRPr lang="en-US" sz="1150" dirty="0"/>
           </a:p>
@@ -20072,7 +20072,7 @@
                 <a:latin typeface="Calibri" pitchFamily="34" charset="0"/>
                 <a:cs typeface="Amiri" pitchFamily="2" charset="-78"/>
               </a:rPr>
-              <a:t>☐  At least one </a:t>
+              <a:t>☐  At least one ‏</a:t>
             </a:r>
             <a:pPr algn="l" indent="0" marL="0">
               <a:buNone/>
@@ -20099,7 +20099,7 @@
                 <a:latin typeface="Calibri" pitchFamily="34" charset="0"/>
                 <a:cs typeface="Amiri" pitchFamily="2" charset="-78"/>
               </a:rPr>
-              <a:t> and one </a:t>
+              <a:t>‏ and one ‏</a:t>
             </a:r>
             <a:pPr algn="l" indent="0" marL="0">
               <a:buNone/>
@@ -20126,7 +20126,7 @@
                 <a:latin typeface="Calibri" pitchFamily="34" charset="0"/>
                 <a:cs typeface="Amiri" pitchFamily="2" charset="-78"/>
               </a:rPr>
-              <a:t> (Develop).</a:t>
+              <a:t>‏ (Develop).</a:t>
             </a:r>
             <a:endParaRPr lang="en-US" sz="1200" dirty="0"/>
           </a:p>
@@ -23450,7 +23450,7 @@
                 <a:latin typeface="Calibri" pitchFamily="34" charset="0"/>
                 <a:cs typeface="Amiri" pitchFamily="2" charset="-78"/>
               </a:rPr>
-              <a:t>write </a:t>
+              <a:t>write ‏</a:t>
             </a:r>
             <a:pPr algn="l" indent="0" marL="0">
               <a:buNone/>
@@ -23477,7 +23477,7 @@
                 <a:latin typeface="Calibri" pitchFamily="34" charset="0"/>
                 <a:cs typeface="Amiri" pitchFamily="2" charset="-78"/>
               </a:rPr>
-              <a:t> with a number 11–20?</a:t>
+              <a:t>‏ with a number 11–20?</a:t>
             </a:r>
             <a:endParaRPr lang="en-US" sz="1100" dirty="0"/>
           </a:p>
@@ -23860,7 +23860,7 @@
                 <a:latin typeface="Calibri" pitchFamily="34" charset="0"/>
                 <a:cs typeface="Amiri" pitchFamily="2" charset="-78"/>
               </a:rPr>
-              <a:t>use linking words (</a:t>
+              <a:t>use linking words (‏</a:t>
             </a:r>
             <a:pPr algn="l" indent="0" marL="0">
               <a:buNone/>
@@ -23968,7 +23968,7 @@
                 <a:latin typeface="Calibri" pitchFamily="34" charset="0"/>
                 <a:cs typeface="Amiri" pitchFamily="2" charset="-78"/>
               </a:rPr>
-              <a:t>)?</a:t>
+              <a:t>‏)?</a:t>
             </a:r>
             <a:endParaRPr lang="en-US" sz="1100" dirty="0"/>
           </a:p>
@@ -27914,7 +27914,7 @@
                 <a:latin typeface="Calibri" pitchFamily="34" charset="0"/>
                 <a:cs typeface="Amiri" pitchFamily="2" charset="-78"/>
               </a:rPr>
-              <a:t>I added reasons (</a:t>
+              <a:t>I added reasons (‏</a:t>
             </a:r>
             <a:pPr algn="l" indent="0" marL="0">
               <a:buNone/>
@@ -27941,7 +27941,7 @@
                 <a:latin typeface="Calibri" pitchFamily="34" charset="0"/>
                 <a:cs typeface="Amiri" pitchFamily="2" charset="-78"/>
               </a:rPr>
-              <a:t>) and extra details without frames.</a:t>
+              <a:t>‏) and extra details without frames.</a:t>
             </a:r>
             <a:endParaRPr lang="en-US" sz="1300" dirty="0"/>
           </a:p>
@@ -32069,7 +32069,7 @@
                 <a:latin typeface="Calibri" pitchFamily="34" charset="0"/>
                 <a:cs typeface="Amiri" pitchFamily="2" charset="-78"/>
               </a:rPr>
-              <a:t>☐  Add a reason (</a:t>
+              <a:t>☐  Add a reason (‏</a:t>
             </a:r>
             <a:pPr algn="l" indent="0" marL="0">
               <a:buNone/>
@@ -32096,7 +32096,7 @@
                 <a:latin typeface="Calibri" pitchFamily="34" charset="0"/>
                 <a:cs typeface="Amiri" pitchFamily="2" charset="-78"/>
               </a:rPr>
-              <a:t>) and an extra detail to every point.</a:t>
+              <a:t>‏) and an extra detail to every point.</a:t>
             </a:r>
             <a:endParaRPr lang="en-US" sz="1300" dirty="0"/>
           </a:p>
@@ -33617,7 +33617,7 @@
                 <a:latin typeface="Calibri" pitchFamily="34" charset="0"/>
                 <a:cs typeface="Amiri" pitchFamily="2" charset="-78"/>
               </a:rPr>
-              <a:t>Join a word from each lesson in one sentence with </a:t>
+              <a:t>Join a word from each lesson in one sentence with ‏</a:t>
             </a:r>
             <a:pPr algn="l" indent="0" marL="0">
               <a:buNone/>
@@ -33644,7 +33644,7 @@
                 <a:latin typeface="Calibri" pitchFamily="34" charset="0"/>
                 <a:cs typeface="Amiri" pitchFamily="2" charset="-78"/>
               </a:rPr>
-              <a:t> or </a:t>
+              <a:t>‏ or ‏</a:t>
             </a:r>
             <a:pPr algn="l" indent="0" marL="0">
               <a:buNone/>
@@ -33671,7 +33671,7 @@
                 <a:latin typeface="Calibri" pitchFamily="34" charset="0"/>
                 <a:cs typeface="Amiri" pitchFamily="2" charset="-78"/>
               </a:rPr>
-              <a:t>.</a:t>
+              <a:t>‏.</a:t>
             </a:r>
             <a:endParaRPr lang="en-US" sz="1150" dirty="0"/>
           </a:p>
@@ -40134,7 +40134,7 @@
                 <a:latin typeface="Calibri" pitchFamily="34" charset="0"/>
                 <a:cs typeface="Amiri" pitchFamily="2" charset="-78"/>
               </a:rPr>
-              <a:t>Languages are feminine and take </a:t>
+              <a:t>Languages are feminine and take ‏</a:t>
             </a:r>
             <a:pPr algn="l" indent="0" marL="0">
               <a:buNone/>
@@ -40161,7 +40161,7 @@
                 <a:latin typeface="Calibri" pitchFamily="34" charset="0"/>
                 <a:cs typeface="Amiri" pitchFamily="2" charset="-78"/>
               </a:rPr>
-              <a:t>.</a:t>
+              <a:t>‏.</a:t>
             </a:r>
             <a:endParaRPr lang="en-US" sz="1000" dirty="0"/>
           </a:p>
